--- a/Fluctus_Laadplan_Celles.pptx
+++ b/Fluctus_Laadplan_Celles.pptx
@@ -10515,7 +10515,46 @@
       </p:sp>
       <p:sp>
         <p:nvSpPr>
-          <p:cNvPr id="63" name="Shape 61"/>
+          <p:cNvPr id="63" name="Text 61"/>
+          <p:cNvSpPr/>
+          <p:nvPr/>
+        </p:nvSpPr>
+        <p:spPr>
+          <a:xfrm>
+            <a:off x="640080" y="6071616"/>
+            <a:ext cx="10058400" cy="237744"/>
+          </a:xfrm>
+          <a:prstGeom prst="rect">
+            <a:avLst/>
+          </a:prstGeom>
+          <a:noFill/>
+          <a:ln/>
+        </p:spPr>
+        <p:txBody>
+          <a:bodyPr wrap="square" lIns="0" tIns="0" rIns="0" bIns="0" rtlCol="0" anchor="ctr"/>
+          <a:lstStyle/>
+          <a:p>
+            <a:pPr indent="0" marL="0">
+              <a:buNone/>
+            </a:pPr>
+            <a:r>
+              <a:rPr lang="en-US" sz="800" i="1" dirty="0">
+                <a:solidFill>
+                  <a:srgbClr val="5A6473"/>
+                </a:solidFill>
+                <a:latin typeface="Arial" pitchFamily="34" charset="0"/>
+                <a:ea typeface="Arial" pitchFamily="34" charset="-122"/>
+                <a:cs typeface="Arial" pitchFamily="34" charset="-120"/>
+              </a:rPr>
+              <a:t>Bron bestaande laadpunten: Departement Mobiliteit en Openbare Werken (Vlaanderen).</a:t>
+            </a:r>
+            <a:endParaRPr lang="en-US" sz="800" dirty="0"/>
+          </a:p>
+        </p:txBody>
+      </p:sp>
+      <p:sp>
+        <p:nvSpPr>
+          <p:cNvPr id="64" name="Shape 62"/>
           <p:cNvSpPr/>
           <p:nvPr/>
         </p:nvSpPr>
@@ -10535,7 +10574,7 @@
       </p:sp>
       <p:pic>
         <p:nvPicPr>
-          <p:cNvPr id="64" name="Image 0" descr="preencoded.png">    </p:cNvPr>
+          <p:cNvPr id="65" name="Image 0" descr="preencoded.png">    </p:cNvPr>
           <p:cNvPicPr>
             <a:picLocks noChangeAspect="1"/>
           </p:cNvPicPr>
@@ -10559,7 +10598,7 @@
       </p:pic>
       <p:sp>
         <p:nvSpPr>
-          <p:cNvPr id="65" name="Text 62"/>
+          <p:cNvPr id="66" name="Text 63"/>
           <p:cNvSpPr/>
           <p:nvPr/>
         </p:nvSpPr>
@@ -10601,7 +10640,7 @@
       </p:sp>
       <p:sp>
         <p:nvSpPr>
-          <p:cNvPr id="66" name="Shape 63"/>
+          <p:cNvPr id="67" name="Shape 64"/>
           <p:cNvSpPr/>
           <p:nvPr/>
         </p:nvSpPr>
@@ -10621,7 +10660,7 @@
       </p:sp>
       <p:pic>
         <p:nvPicPr>
-          <p:cNvPr id="67" name="Image 1" descr="preencoded.png">    </p:cNvPr>
+          <p:cNvPr id="68" name="Image 1" descr="preencoded.png">    </p:cNvPr>
           <p:cNvPicPr>
             <a:picLocks noChangeAspect="1"/>
           </p:cNvPicPr>
@@ -10645,7 +10684,7 @@
       </p:pic>
       <p:sp>
         <p:nvSpPr>
-          <p:cNvPr id="68" name="Text 64"/>
+          <p:cNvPr id="69" name="Text 65"/>
           <p:cNvSpPr/>
           <p:nvPr/>
         </p:nvSpPr>
@@ -10687,7 +10726,7 @@
       </p:sp>
       <p:sp>
         <p:nvSpPr>
-          <p:cNvPr id="69" name="Shape 65"/>
+          <p:cNvPr id="70" name="Shape 66"/>
           <p:cNvSpPr/>
           <p:nvPr/>
         </p:nvSpPr>
@@ -10707,7 +10746,7 @@
       </p:sp>
       <p:pic>
         <p:nvPicPr>
-          <p:cNvPr id="70" name="Image 2" descr="preencoded.png">    </p:cNvPr>
+          <p:cNvPr id="71" name="Image 2" descr="preencoded.png">    </p:cNvPr>
           <p:cNvPicPr>
             <a:picLocks noChangeAspect="1"/>
           </p:cNvPicPr>
@@ -10731,7 +10770,7 @@
       </p:pic>
       <p:sp>
         <p:nvSpPr>
-          <p:cNvPr id="71" name="Text 66"/>
+          <p:cNvPr id="72" name="Text 67"/>
           <p:cNvSpPr/>
           <p:nvPr/>
         </p:nvSpPr>
@@ -10773,7 +10812,7 @@
       </p:sp>
       <p:sp>
         <p:nvSpPr>
-          <p:cNvPr id="72" name="Text 67"/>
+          <p:cNvPr id="73" name="Text 68"/>
           <p:cNvSpPr/>
           <p:nvPr/>
         </p:nvSpPr>
@@ -10812,7 +10851,7 @@
       </p:sp>
       <p:sp>
         <p:nvSpPr>
-          <p:cNvPr id="73" name="Text 68"/>
+          <p:cNvPr id="74" name="Text 69"/>
           <p:cNvSpPr/>
           <p:nvPr/>
         </p:nvSpPr>
